--- a/output/proofofwork-general-deck.pptx
+++ b/output/proofofwork-general-deck.pptx
@@ -111,7 +111,7 @@
                   <a:srgbClr val="111827"/>
                 </a:solidFill>
               </a:rPr>
-              <a:t>The Bitcoin Computer</a:t>
+              <a:t>The ProofOfWork Computer</a:t>
             </a:r>
           </a:p>
         </p:txBody>
@@ -157,7 +157,7 @@
                   <a:srgbClr val="1f2937"/>
                 </a:solidFill>
               </a:rPr>
-              <a:t>The Bitcoin Computer.</a:t>
+              <a:t>The ProofOfWork Computer.</a:t>
             </a:r>
           </a:p>
           <a:p>
@@ -168,7 +168,7 @@
                   <a:srgbClr val="1f2937"/>
                 </a:solidFill>
               </a:rPr>
-              <a:t>Identity, mail, files, pages, marketplace actions, Pay2Speak funding, token mints, logs, and growth signals written to Bitcoin.</a:t>
+              <a:t>Identity, mail, files, pages, marketplace actions, Pay2Speak funding, token mints, logs, and growth signals written to ProofOfWork.</a:t>
             </a:r>
           </a:p>
         </p:txBody>
@@ -203,7 +203,7 @@
                   <a:srgbClr val="64748b"/>
                 </a:solidFill>
               </a:rPr>
-              <a:t>Bitcoin Computer · local-first · on-chain · agent-readable</a:t>
+              <a:t>ProofOfWork Computer · local-first · on-chain · agent-readable</a:t>
             </a:r>
           </a:p>
         </p:txBody>
@@ -341,7 +341,7 @@
                   <a:srgbClr val="1f2937"/>
                 </a:solidFill>
               </a:rPr>
-              <a:t>Tokens are mint-first and Bitcoin-readable.</a:t>
+              <a:t>Tokens are mint-first and ProofOfWork-readable.</a:t>
             </a:r>
           </a:p>
           <a:p>
@@ -396,18 +396,18 @@
                   <a:srgbClr val="1f2937"/>
                 </a:solidFill>
               </a:rPr>
-              <a:t>WORK starts with 21,000,000 max supply, 1,000 WORK per mint, and 1,000 sats per mint.</a:t>
-            </a:r>
-          </a:p>
-          <a:p>
-            <a:pPr/>
-            <a:r>
-              <a:rPr lang="en-US" sz="2050">
-                <a:solidFill>
-                  <a:srgbClr val="1f2937"/>
-                </a:solidFill>
-              </a:rPr>
-              <a:t>That is exactly 1 sat per WORK.</a:t>
+              <a:t>WORK starts with 21,000,000 max supply, 1,000 WORK per mint, and 1,000 proofs per mint.</a:t>
+            </a:r>
+          </a:p>
+          <a:p>
+            <a:pPr/>
+            <a:r>
+              <a:rPr lang="en-US" sz="2050">
+                <a:solidFill>
+                  <a:srgbClr val="1f2937"/>
+                </a:solidFill>
+              </a:rPr>
+              <a:t>That is exactly 1 proof per WORK.</a:t>
             </a:r>
           </a:p>
         </p:txBody>
@@ -442,7 +442,7 @@
                   <a:srgbClr val="64748b"/>
                 </a:solidFill>
               </a:rPr>
-              <a:t>Bitcoin Computer · local-first · on-chain · agent-readable</a:t>
+              <a:t>ProofOfWork Computer · local-first · on-chain · agent-readable</a:t>
             </a:r>
           </a:p>
         </p:txBody>
@@ -580,7 +580,7 @@
                   <a:srgbClr val="1f2937"/>
                 </a:solidFill>
               </a:rPr>
-              <a:t>Log is the public Bitcoin Computer activity feed.</a:t>
+              <a:t>Log is the public ProofOfWork Computer activity feed.</a:t>
             </a:r>
           </a:p>
           <a:p>
@@ -602,7 +602,7 @@
                   <a:srgbClr val="1f2937"/>
                 </a:solidFill>
               </a:rPr>
-              <a:t>Growth compares the canonical success-case model against real confirmed network value in sats and USD.</a:t>
+              <a:t>Growth compares the canonical success-case model against real confirmed network value in proofs and USD.</a:t>
             </a:r>
           </a:p>
           <a:p>
@@ -703,7 +703,7 @@
                   <a:srgbClr val="64748b"/>
                 </a:solidFill>
               </a:rPr>
-              <a:t>Bitcoin Computer · local-first · on-chain · agent-readable</a:t>
+              <a:t>ProofOfWork Computer · local-first · on-chain · agent-readable</a:t>
             </a:r>
           </a:p>
         </p:txBody>
@@ -885,7 +885,7 @@
                   <a:srgbClr val="374151"/>
                 </a:solidFill>
               </a:rPr>
-              <a:t>Sats with every interaction.</a:t>
+              <a:t>Proofs with every interaction.</a:t>
             </a:r>
           </a:p>
           <a:p>
@@ -964,7 +964,7 @@
                   <a:srgbClr val="64748b"/>
                 </a:solidFill>
               </a:rPr>
-              <a:t>Bitcoin Computer · local-first · on-chain · agent-readable</a:t>
+              <a:t>ProofOfWork Computer · local-first · on-chain · agent-readable</a:t>
             </a:r>
           </a:p>
         </p:txBody>
@@ -1102,7 +1102,7 @@
                   <a:srgbClr val="1f2937"/>
                 </a:solidFill>
               </a:rPr>
-              <a:t>ProofOfWork.Me is a new interface for Bitcoin.</a:t>
+              <a:t>ProofOfWork.Me is a new interface for ProofOfWork.</a:t>
             </a:r>
           </a:p>
           <a:p>
@@ -1269,7 +1269,7 @@
                   <a:srgbClr val="64748b"/>
                 </a:solidFill>
               </a:rPr>
-              <a:t>Bitcoin Computer · local-first · on-chain · agent-readable</a:t>
+              <a:t>ProofOfWork Computer · local-first · on-chain · agent-readable</a:t>
             </a:r>
           </a:p>
         </p:txBody>
@@ -1464,7 +1464,7 @@
                   <a:srgbClr val="64748b"/>
                 </a:solidFill>
               </a:rPr>
-              <a:t>Bitcoin Computer · local-first · on-chain · agent-readable</a:t>
+              <a:t>ProofOfWork Computer · local-first · on-chain · agent-readable</a:t>
             </a:r>
           </a:p>
         </p:txBody>
@@ -1567,7 +1567,7 @@
                   <a:srgbClr val="111827"/>
                 </a:solidFill>
               </a:rPr>
-              <a:t>Bitcoin Is The Source Of Truth</a:t>
+              <a:t>ProofOfWork Is The Source Of Truth</a:t>
             </a:r>
           </a:p>
         </p:txBody>
@@ -1602,7 +1602,7 @@
                   <a:srgbClr val="1f2937"/>
                 </a:solidFill>
               </a:rPr>
-              <a:t>Bitcoin gives the app a hard foundation:</a:t>
+              <a:t>ProofOfWork gives the app a hard foundation:</a:t>
             </a:r>
           </a:p>
           <a:p>
@@ -1714,7 +1714,7 @@
                   <a:srgbClr val="64748b"/>
                 </a:solidFill>
               </a:rPr>
-              <a:t>Bitcoin Computer · local-first · on-chain · agent-readable</a:t>
+              <a:t>ProofOfWork Computer · local-first · on-chain · agent-readable</a:t>
             </a:r>
           </a:p>
         </p:txBody>
@@ -1852,7 +1852,7 @@
                   <a:srgbClr val="1f2937"/>
                 </a:solidFill>
               </a:rPr>
-              <a:t>Claim a permanent Bitcoin-native identity:</a:t>
+              <a:t>Claim a permanent ProofOfWork-native identity:</a:t>
             </a:r>
           </a:p>
           <a:p>
@@ -1874,7 +1874,7 @@
                   <a:srgbClr val="1f2937"/>
                 </a:solidFill>
               </a:rPr>
-              <a:t>IDs resolve to Bitcoin receive addresses.</a:t>
+              <a:t>IDs resolve to ProofOfWork receive addresses.</a:t>
             </a:r>
           </a:p>
           <a:p>
@@ -1931,7 +1931,7 @@
                   <a:srgbClr val="64748b"/>
                 </a:solidFill>
               </a:rPr>
-              <a:t>Bitcoin Computer · local-first · on-chain · agent-readable</a:t>
+              <a:t>ProofOfWork Computer · local-first · on-chain · agent-readable</a:t>
             </a:r>
           </a:p>
         </p:txBody>
@@ -2034,7 +2034,7 @@
                   <a:srgbClr val="111827"/>
                 </a:solidFill>
               </a:rPr>
-              <a:t>Bitcoin Mail</a:t>
+              <a:t>ProofOfWork Mail</a:t>
             </a:r>
           </a:p>
         </p:txBody>
@@ -2069,7 +2069,7 @@
                   <a:srgbClr val="1f2937"/>
                 </a:solidFill>
               </a:rPr>
-              <a:t>Send messages with sats attached.</a:t>
+              <a:t>Send messages with proofs attached.</a:t>
             </a:r>
           </a:p>
           <a:p>
@@ -2137,7 +2137,7 @@
                   <a:srgbClr val="64748b"/>
                 </a:solidFill>
               </a:rPr>
-              <a:t>Bitcoin Computer · local-first · on-chain · agent-readable</a:t>
+              <a:t>ProofOfWork Computer · local-first · on-chain · agent-readable</a:t>
             </a:r>
           </a:p>
         </p:txBody>
@@ -2354,7 +2354,7 @@
                   <a:srgbClr val="64748b"/>
                 </a:solidFill>
               </a:rPr>
-              <a:t>Bitcoin Computer · local-first · on-chain · agent-readable</a:t>
+              <a:t>ProofOfWork Computer · local-first · on-chain · agent-readable</a:t>
             </a:r>
           </a:p>
         </p:txBody>
@@ -2492,7 +2492,7 @@
                   <a:srgbClr val="1f2937"/>
                 </a:solidFill>
               </a:rPr>
-              <a:t>Browser renders HTML from Bitcoin transactions.</a:t>
+              <a:t>Browser renders HTML from ProofOfWork transactions.</a:t>
             </a:r>
           </a:p>
           <a:p>
@@ -2571,7 +2571,7 @@
                   <a:srgbClr val="64748b"/>
                 </a:solidFill>
               </a:rPr>
-              <a:t>Bitcoin Computer · local-first · on-chain · agent-readable</a:t>
+              <a:t>ProofOfWork Computer · local-first · on-chain · agent-readable</a:t>
             </a:r>
           </a:p>
         </p:txBody>
@@ -2709,7 +2709,7 @@
                   <a:srgbClr val="1f2937"/>
                 </a:solidFill>
               </a:rPr>
-              <a:t>The canonical welcome page is already on Bitcoin:</a:t>
+              <a:t>The canonical welcome page is already on ProofOfWork:</a:t>
             </a:r>
           </a:p>
           <a:p>
@@ -2777,7 +2777,7 @@
                   <a:srgbClr val="64748b"/>
                 </a:solidFill>
               </a:rPr>
-              <a:t>Bitcoin Computer · local-first · on-chain · agent-readable</a:t>
+              <a:t>ProofOfWork Computer · local-first · on-chain · agent-readable</a:t>
             </a:r>
           </a:p>
         </p:txBody>
@@ -3003,7 +3003,7 @@
                   <a:srgbClr val="1f2937"/>
                 </a:solidFill>
               </a:rPr>
-              <a:t>Competing buys conflict at the Bitcoin UTXO layer.</a:t>
+              <a:t>Competing buys conflict at the ProofOfWork UTXO layer.</a:t>
             </a:r>
           </a:p>
         </p:txBody>
@@ -3038,7 +3038,7 @@
                   <a:srgbClr val="64748b"/>
                 </a:solidFill>
               </a:rPr>
-              <a:t>Bitcoin Computer · local-first · on-chain · agent-readable</a:t>
+              <a:t>ProofOfWork Computer · local-first · on-chain · agent-readable</a:t>
             </a:r>
           </a:p>
         </p:txBody>

--- a/output/proofofwork-general-deck.pptx
+++ b/output/proofofwork-general-deck.pptx
@@ -168,7 +168,7 @@
                   <a:srgbClr val="1f2937"/>
                 </a:solidFill>
               </a:rPr>
-              <a:t>Identity, mail, files, pages, marketplace actions, Pay2Speak funding, token mints, logs, and growth signals written to ProofOfWork.</a:t>
+              <a:t>Identity, mail, files, pages, marketplace actions, credit mints, wallet transfers, logs, and growth signals written to ProofOfWork.</a:t>
             </a:r>
           </a:p>
         </p:txBody>
@@ -306,7 +306,7 @@
                   <a:srgbClr val="111827"/>
                 </a:solidFill>
               </a:rPr>
-              <a:t>Tokens</a:t>
+              <a:t>Credits</a:t>
             </a:r>
           </a:p>
         </p:txBody>
@@ -341,7 +341,7 @@
                   <a:srgbClr val="1f2937"/>
                 </a:solidFill>
               </a:rPr>
-              <a:t>Tokens are mint-first and ProofOfWork-readable.</a:t>
+              <a:t>Credits are mint-first and ProofOfWork-readable.</a:t>
             </a:r>
           </a:p>
           <a:p>
@@ -374,18 +374,7 @@
                   <a:srgbClr val="1f2937"/>
                 </a:solidFill>
               </a:rPr>
-              <a:t>Creation pays the token index.</a:t>
-            </a:r>
-          </a:p>
-          <a:p>
-            <a:pPr/>
-            <a:r>
-              <a:rPr lang="en-US" sz="2050">
-                <a:solidFill>
-                  <a:srgbClr val="1f2937"/>
-                </a:solidFill>
-              </a:rPr>
-              <a:t>Mints pay each token registry directly at the owner-set price.</a:t>
+              <a:t>Creation pays the credit index.</a:t>
             </a:r>
           </a:p>
           <a:p>
@@ -396,6 +385,17 @@
                   <a:srgbClr val="1f2937"/>
                 </a:solidFill>
               </a:rPr>
+              <a:t>Mints, transfers, listings, seals, delistings, and buys pay each credit registry directly.</a:t>
+            </a:r>
+          </a:p>
+          <a:p>
+            <a:pPr/>
+            <a:r>
+              <a:rPr lang="en-US" sz="1850">
+                <a:solidFill>
+                  <a:srgbClr val="1f2937"/>
+                </a:solidFill>
+              </a:rPr>
               <a:t>WORK starts with 21,000,000 max supply, 1,000 WORK per mint, and 1,000 proofs per mint.</a:t>
             </a:r>
           </a:p>
@@ -408,6 +408,17 @@
                 </a:solidFill>
               </a:rPr>
               <a:t>That is exactly 1 proof per WORK.</a:t>
+            </a:r>
+          </a:p>
+          <a:p>
+            <a:pPr/>
+            <a:r>
+              <a:rPr lang="en-US" sz="1700">
+                <a:solidFill>
+                  <a:srgbClr val="1f2937"/>
+                </a:solidFill>
+              </a:rPr>
+              <a:t>Wallet is the connected-address credit surface for balances, transfer logs, credit transfers, owned listings, delistings, and sale history.</a:t>
             </a:r>
           </a:p>
         </p:txBody>
@@ -591,7 +602,7 @@
                   <a:srgbClr val="1f2937"/>
                 </a:solidFill>
               </a:rPr>
-              <a:t>It indexes registrations, receiver updates, transfers, listings, purchases, messages, replies, files, attachments, Browser-readable pages, Pay2Speak funding, token creations, and token mints.</a:t>
+              <a:t>It indexes registrations, receiver updates, transfers, listings, seals, delistings, purchases, messages, replies, files, attachments, Browser-readable pages, credit creations, credit mints, credit transfers, credit listings, and credit sales.</a:t>
             </a:r>
           </a:p>
           <a:p>
@@ -603,6 +614,17 @@
                 </a:solidFill>
               </a:rPr>
               <a:t>Growth compares the canonical success-case model against real confirmed network value in proofs and USD.</a:t>
+            </a:r>
+          </a:p>
+          <a:p>
+            <a:pPr/>
+            <a:r>
+              <a:rPr lang="en-US" sz="1700">
+                <a:solidFill>
+                  <a:srgbClr val="1f2937"/>
+                </a:solidFill>
+              </a:rPr>
+              <a:t>WORK and Growth share the same confirmed network-value payload and live node-backed BTC/USD benchmark.</a:t>
             </a:r>
           </a:p>
           <a:p>
@@ -907,7 +929,7 @@
                   <a:srgbClr val="374151"/>
                 </a:solidFill>
               </a:rPr>
-              <a:t>Public ownership, marketplace, funding, and token records.</a:t>
+              <a:t>Public ownership, marketplace, funding, and credit records.</a:t>
             </a:r>
           </a:p>
           <a:p>
@@ -1179,18 +1201,7 @@
                   <a:srgbClr val="1f2937"/>
                 </a:solidFill>
               </a:rPr>
-              <a:t>Pay2Speak.</a:t>
-            </a:r>
-          </a:p>
-          <a:p>
-            <a:pPr/>
-            <a:r>
-              <a:rPr lang="en-US" sz="2050">
-                <a:solidFill>
-                  <a:srgbClr val="1f2937"/>
-                </a:solidFill>
-              </a:rPr>
-              <a:t>Tokens.</a:t>
+              <a:t>Credits.</a:t>
             </a:r>
           </a:p>
           <a:p>
@@ -1235,6 +1246,17 @@
                 </a:solidFill>
               </a:rPr>
               <a:t>Agents.</a:t>
+            </a:r>
+          </a:p>
+          <a:p>
+            <a:pPr/>
+            <a:r>
+              <a:rPr lang="en-US" sz="2050">
+                <a:solidFill>
+                  <a:srgbClr val="1f2937"/>
+                </a:solidFill>
+              </a:rPr>
+              <a:t>Value.</a:t>
             </a:r>
           </a:p>
         </p:txBody>
@@ -2926,7 +2948,18 @@
                   <a:srgbClr val="1f2937"/>
                 </a:solidFill>
               </a:rPr>
-              <a:t>Current marketplace protocol:</a:t>
+              <a:t>Credits are transferable market assets too.</a:t>
+            </a:r>
+          </a:p>
+          <a:p>
+            <a:pPr/>
+            <a:r>
+              <a:rPr lang="en-US" sz="2050">
+                <a:solidFill>
+                  <a:srgbClr val="1f2937"/>
+                </a:solidFill>
+              </a:rPr>
+              <a:t>Current marketplace protocols:</a:t>
             </a:r>
           </a:p>
           <a:p>
@@ -2981,7 +3014,51 @@
                   <a:srgbClr val="1f2937"/>
                 </a:solidFill>
               </a:rPr>
-              <a:t>Sellers publish on-chain listings.</a:t>
+              <a:t>pwt1:list5</a:t>
+            </a:r>
+          </a:p>
+          <a:p>
+            <a:pPr/>
+            <a:r>
+              <a:rPr lang="en-US" sz="2050">
+                <a:solidFill>
+                  <a:srgbClr val="1f2937"/>
+                </a:solidFill>
+              </a:rPr>
+              <a:t>pwt1:seal5</a:t>
+            </a:r>
+          </a:p>
+          <a:p>
+            <a:pPr/>
+            <a:r>
+              <a:rPr lang="en-US" sz="2050">
+                <a:solidFill>
+                  <a:srgbClr val="1f2937"/>
+                </a:solidFill>
+              </a:rPr>
+              <a:t>pwt1:buy5</a:t>
+            </a:r>
+          </a:p>
+          <a:p>
+            <a:pPr/>
+            <a:r>
+              <a:rPr lang="en-US" sz="2050">
+                <a:solidFill>
+                  <a:srgbClr val="1f2937"/>
+                </a:solidFill>
+              </a:rPr>
+              <a:t>pwt1:delist5</a:t>
+            </a:r>
+          </a:p>
+          <a:p>
+            <a:pPr/>
+            <a:r>
+              <a:rPr lang="en-US" sz="2050">
+                <a:solidFill>
+                  <a:srgbClr val="1f2937"/>
+                </a:solidFill>
+              </a:rPr>
+              <a:t>Sellers publish on-chain listings and seal exact sale terms.</a:t>
             </a:r>
           </a:p>
           <a:p>
@@ -2992,18 +3069,7 @@
                   <a:srgbClr val="1f2937"/>
                 </a:solidFill>
               </a:rPr>
-              <a:t>Buyers settle by spending a sale-ticket UTXO, paying the seller, paying the registry mutation fee, and writing the transfer event.</a:t>
-            </a:r>
-          </a:p>
-          <a:p>
-            <a:pPr/>
-            <a:r>
-              <a:rPr lang="en-US" sz="2050">
-                <a:solidFill>
-                  <a:srgbClr val="1f2937"/>
-                </a:solidFill>
-              </a:rPr>
-              <a:t>Competing buys conflict at the ProofOfWork UTXO layer.</a:t>
+              <a:t>Buyers settle by spending a sale-ticket UTXO, paying the seller, paying the registry mutation fee, and writing the transfer or buy event.</a:t>
             </a:r>
           </a:p>
         </p:txBody>

--- a/output/proofofwork-general-deck.pptx
+++ b/output/proofofwork-general-deck.pptx
@@ -15,6 +15,7 @@
     <p:sldId id="266" r:id="rId11"/>
     <p:sldId id="267" r:id="rId12"/>
     <p:sldId id="268" r:id="rId13"/>
+    <p:sldId id="269" r:id="rId14"/>
   </p:sldIdLst>
   <p:sldSz cx="12191695" cy="6858000" type="wide"/>
   <p:notesSz cx="6858000" cy="9144000"/>
@@ -168,7 +169,7 @@
                   <a:srgbClr val="1f2937"/>
                 </a:solidFill>
               </a:rPr>
-              <a:t>Identity, mail, files, pages, marketplace actions, credit mints, wallet transfers, logs, and growth signals written to ProofOfWork.</a:t>
+              <a:t>Identity, mail, files, pages, marketplace actions, credit mints, wallet transfers, bonds, logs, and growth signals written to ProofOfWork.</a:t>
             </a:r>
           </a:p>
         </p:txBody>
@@ -352,7 +353,7 @@
                   <a:srgbClr val="1f2937"/>
                 </a:solidFill>
               </a:rPr>
-              <a:t>token.proofofwork.me</a:t>
+              <a:t>credit.proofofwork.me</a:t>
             </a:r>
           </a:p>
           <a:p>
@@ -556,7 +557,7 @@
                   <a:srgbClr val="111827"/>
                 </a:solidFill>
               </a:rPr>
-              <a:t>Log And Growth</a:t>
+              <a:t>Wallet And Bonds</a:t>
             </a:r>
           </a:p>
         </p:txBody>
@@ -591,7 +592,40 @@
                   <a:srgbClr val="1f2937"/>
                 </a:solidFill>
               </a:rPr>
-              <a:t>Log is the public ProofOfWork Computer activity feed.</a:t>
+              <a:t>Wallet keeps connected-address signing local:</a:t>
+            </a:r>
+          </a:p>
+          <a:p>
+            <a:pPr/>
+            <a:r>
+              <a:rPr lang="en-US" sz="2050">
+                <a:solidFill>
+                  <a:srgbClr val="1f2937"/>
+                </a:solidFill>
+              </a:rPr>
+              <a:t>wallet.proofofwork.me</a:t>
+            </a:r>
+          </a:p>
+          <a:p>
+            <a:pPr/>
+            <a:r>
+              <a:rPr lang="en-US" sz="2050">
+                <a:solidFill>
+                  <a:srgbClr val="1f2937"/>
+                </a:solidFill>
+              </a:rPr>
+              <a:t>Infinity Bonds issue POWB from confirmed pwm1:m:powb actions:</a:t>
+            </a:r>
+          </a:p>
+          <a:p>
+            <a:pPr/>
+            <a:r>
+              <a:rPr lang="en-US" sz="2050">
+                <a:solidFill>
+                  <a:srgbClr val="1f2937"/>
+                </a:solidFill>
+              </a:rPr>
+              <a:t>infinity.proofofwork.me</a:t>
             </a:r>
           </a:p>
           <a:p>
@@ -602,7 +636,18 @@
                   <a:srgbClr val="1f2937"/>
                 </a:solidFill>
               </a:rPr>
-              <a:t>It indexes registrations, receiver updates, transfers, listings, seals, delistings, purchases, messages, replies, files, attachments, Browser-readable pages, credit creations, credit mints, credit transfers, credit listings, and credit sales.</a:t>
+              <a:t>Inception Bonds issue INCB from direct proofs plus valid same-transaction WORK attachments fixed by the hash-bound H-1 oracle:</a:t>
+            </a:r>
+          </a:p>
+          <a:p>
+            <a:pPr/>
+            <a:r>
+              <a:rPr lang="en-US" sz="2050">
+                <a:solidFill>
+                  <a:srgbClr val="1f2937"/>
+                </a:solidFill>
+              </a:rPr>
+              <a:t>inception.proofofwork.me</a:t>
             </a:r>
           </a:p>
           <a:p>
@@ -613,84 +658,7 @@
                   <a:srgbClr val="1f2937"/>
                 </a:solidFill>
               </a:rPr>
-              <a:t>Growth compares the canonical success-case model against real confirmed network value in proofs and USD.</a:t>
-            </a:r>
-          </a:p>
-          <a:p>
-            <a:pPr/>
-            <a:r>
-              <a:rPr lang="en-US" sz="1700">
-                <a:solidFill>
-                  <a:srgbClr val="1f2937"/>
-                </a:solidFill>
-              </a:rPr>
-              <a:t>WORK and Growth share the same confirmed network-value payload and live node-backed BTC/USD benchmark.</a:t>
-            </a:r>
-          </a:p>
-          <a:p>
-            <a:pPr/>
-            <a:r>
-              <a:rPr lang="en-US" sz="2050">
-                <a:solidFill>
-                  <a:srgbClr val="1f2937"/>
-                </a:solidFill>
-              </a:rPr>
-              <a:t>The model adds every new product with consistent inputs:</a:t>
-            </a:r>
-          </a:p>
-          <a:p>
-            <a:pPr marL="342900" indent="-171450"/>
-            <a:r>
-              <a:rPr lang="en-US" sz="2050">
-                <a:solidFill>
-                  <a:srgbClr val="374151"/>
-                </a:solidFill>
-              </a:rPr>
-              <a:t>Real chain metrics.</a:t>
-            </a:r>
-          </a:p>
-          <a:p>
-            <a:pPr marL="342900" indent="-171450"/>
-            <a:r>
-              <a:rPr lang="en-US" sz="2050">
-                <a:solidFill>
-                  <a:srgbClr val="374151"/>
-                </a:solidFill>
-              </a:rPr>
-              <a:t>Usage assumptions.</a:t>
-            </a:r>
-          </a:p>
-          <a:p>
-            <a:pPr marL="342900" indent="-171450"/>
-            <a:r>
-              <a:rPr lang="en-US" sz="2050">
-                <a:solidFill>
-                  <a:srgbClr val="374151"/>
-                </a:solidFill>
-              </a:rPr>
-              <a:t>Value assumptions.</a:t>
-            </a:r>
-          </a:p>
-          <a:p>
-            <a:pPr marL="342900" indent="-171450"/>
-            <a:r>
-              <a:rPr lang="en-US" sz="2050">
-                <a:solidFill>
-                  <a:srgbClr val="374151"/>
-                </a:solidFill>
-              </a:rPr>
-              <a:t>Fee elasticity.</a:t>
-            </a:r>
-          </a:p>
-          <a:p>
-            <a:pPr marL="342900" indent="-171450"/>
-            <a:r>
-              <a:rPr lang="en-US" sz="2050">
-                <a:solidFill>
-                  <a:srgbClr val="374151"/>
-                </a:solidFill>
-              </a:rPr>
-              <a:t>Blockspace accounting.</a:t>
+              <a:t>Both bond families reuse the confirmed credit sale-ticket market while preserving their own supply and network-value rules.</a:t>
             </a:r>
           </a:p>
         </p:txBody>
@@ -828,7 +796,7 @@
                   <a:srgbClr val="111827"/>
                 </a:solidFill>
               </a:rPr>
-              <a:t>Agent-Readable By Design</a:t>
+              <a:t>Log And Growth</a:t>
             </a:r>
           </a:p>
         </p:txBody>
@@ -863,18 +831,51 @@
                   <a:srgbClr val="1f2937"/>
                 </a:solidFill>
               </a:rPr>
-              <a:t>Agents need identity, memory, money, and verifiable state.</a:t>
-            </a:r>
-          </a:p>
-          <a:p>
-            <a:pPr/>
-            <a:r>
-              <a:rPr lang="en-US" sz="2050">
-                <a:solidFill>
-                  <a:srgbClr val="1f2937"/>
-                </a:solidFill>
-              </a:rPr>
-              <a:t>ProofOfWork.Me gives agents:</a:t>
+              <a:t>Log is the public ProofOfWork Computer activity feed.</a:t>
+            </a:r>
+          </a:p>
+          <a:p>
+            <a:pPr/>
+            <a:r>
+              <a:rPr lang="en-US" sz="1700">
+                <a:solidFill>
+                  <a:srgbClr val="1f2937"/>
+                </a:solidFill>
+              </a:rPr>
+              <a:t>It indexes registrations, receiver updates, transfers, listings, seals, delistings, purchases, messages, replies, files, attachments, Browser-readable pages, credit creations, credit mints, credit transfers, credit listings, and credit sales.</a:t>
+            </a:r>
+          </a:p>
+          <a:p>
+            <a:pPr/>
+            <a:r>
+              <a:rPr lang="en-US" sz="1700">
+                <a:solidFill>
+                  <a:srgbClr val="1f2937"/>
+                </a:solidFill>
+              </a:rPr>
+              <a:t>Growth compares the canonical success-case model against real confirmed network value in proofs and USD.</a:t>
+            </a:r>
+          </a:p>
+          <a:p>
+            <a:pPr/>
+            <a:r>
+              <a:rPr lang="en-US" sz="1700">
+                <a:solidFill>
+                  <a:srgbClr val="1f2937"/>
+                </a:solidFill>
+              </a:rPr>
+              <a:t>WORK and Growth share the same confirmed network-value payload and live node-backed USD benchmark.</a:t>
+            </a:r>
+          </a:p>
+          <a:p>
+            <a:pPr/>
+            <a:r>
+              <a:rPr lang="en-US" sz="2050">
+                <a:solidFill>
+                  <a:srgbClr val="1f2937"/>
+                </a:solidFill>
+              </a:rPr>
+              <a:t>The model adds every new product with consistent inputs:</a:t>
             </a:r>
           </a:p>
           <a:p>
@@ -885,7 +886,7 @@
                   <a:srgbClr val="374151"/>
                 </a:solidFill>
               </a:rPr>
-              <a:t>Handles.</a:t>
+              <a:t>Real chain metrics.</a:t>
             </a:r>
           </a:p>
           <a:p>
@@ -896,7 +897,7 @@
                   <a:srgbClr val="374151"/>
                 </a:solidFill>
               </a:rPr>
-              <a:t>Chain-readable messages.</a:t>
+              <a:t>Usage assumptions.</a:t>
             </a:r>
           </a:p>
           <a:p>
@@ -907,7 +908,7 @@
                   <a:srgbClr val="374151"/>
                 </a:solidFill>
               </a:rPr>
-              <a:t>Proofs with every interaction.</a:t>
+              <a:t>Value assumptions.</a:t>
             </a:r>
           </a:p>
           <a:p>
@@ -918,7 +919,7 @@
                   <a:srgbClr val="374151"/>
                 </a:solidFill>
               </a:rPr>
-              <a:t>Durable files and instructions.</a:t>
+              <a:t>Fee elasticity.</a:t>
             </a:r>
           </a:p>
           <a:p>
@@ -929,29 +930,7 @@
                   <a:srgbClr val="374151"/>
                 </a:solidFill>
               </a:rPr>
-              <a:t>Public ownership, marketplace, funding, and credit records.</a:t>
-            </a:r>
-          </a:p>
-          <a:p>
-            <a:pPr marL="342900" indent="-171450"/>
-            <a:r>
-              <a:rPr lang="en-US" sz="2050">
-                <a:solidFill>
-                  <a:srgbClr val="374151"/>
-                </a:solidFill>
-              </a:rPr>
-              <a:t>Local wallet authority controlled by humans.</a:t>
-            </a:r>
-          </a:p>
-          <a:p>
-            <a:pPr/>
-            <a:r>
-              <a:rPr lang="en-US" sz="2050" b="1">
-                <a:solidFill>
-                  <a:srgbClr val="1f2937"/>
-                </a:solidFill>
-              </a:rPr>
-              <a:t>Humans sign. Agents verify.</a:t>
+              <a:t>Blockspace accounting.</a:t>
             </a:r>
           </a:p>
         </p:txBody>
@@ -1089,7 +1068,7 @@
                   <a:srgbClr val="111827"/>
                 </a:solidFill>
               </a:rPr>
-              <a:t>The Final Network</a:t>
+              <a:t>Agent-Readable By Design</a:t>
             </a:r>
           </a:p>
         </p:txBody>
@@ -1124,6 +1103,267 @@
                   <a:srgbClr val="1f2937"/>
                 </a:solidFill>
               </a:rPr>
+              <a:t>Agents need identity, memory, money, and verifiable state.</a:t>
+            </a:r>
+          </a:p>
+          <a:p>
+            <a:pPr/>
+            <a:r>
+              <a:rPr lang="en-US" sz="2050">
+                <a:solidFill>
+                  <a:srgbClr val="1f2937"/>
+                </a:solidFill>
+              </a:rPr>
+              <a:t>ProofOfWork.Me gives agents:</a:t>
+            </a:r>
+          </a:p>
+          <a:p>
+            <a:pPr marL="342900" indent="-171450"/>
+            <a:r>
+              <a:rPr lang="en-US" sz="2050">
+                <a:solidFill>
+                  <a:srgbClr val="374151"/>
+                </a:solidFill>
+              </a:rPr>
+              <a:t>Handles.</a:t>
+            </a:r>
+          </a:p>
+          <a:p>
+            <a:pPr marL="342900" indent="-171450"/>
+            <a:r>
+              <a:rPr lang="en-US" sz="2050">
+                <a:solidFill>
+                  <a:srgbClr val="374151"/>
+                </a:solidFill>
+              </a:rPr>
+              <a:t>Chain-readable messages.</a:t>
+            </a:r>
+          </a:p>
+          <a:p>
+            <a:pPr marL="342900" indent="-171450"/>
+            <a:r>
+              <a:rPr lang="en-US" sz="2050">
+                <a:solidFill>
+                  <a:srgbClr val="374151"/>
+                </a:solidFill>
+              </a:rPr>
+              <a:t>Proofs with every interaction.</a:t>
+            </a:r>
+          </a:p>
+          <a:p>
+            <a:pPr marL="342900" indent="-171450"/>
+            <a:r>
+              <a:rPr lang="en-US" sz="2050">
+                <a:solidFill>
+                  <a:srgbClr val="374151"/>
+                </a:solidFill>
+              </a:rPr>
+              <a:t>Durable files and instructions.</a:t>
+            </a:r>
+          </a:p>
+          <a:p>
+            <a:pPr marL="342900" indent="-171450"/>
+            <a:r>
+              <a:rPr lang="en-US" sz="2050">
+                <a:solidFill>
+                  <a:srgbClr val="374151"/>
+                </a:solidFill>
+              </a:rPr>
+              <a:t>Public ownership, marketplace, funding, and credit records.</a:t>
+            </a:r>
+          </a:p>
+          <a:p>
+            <a:pPr marL="342900" indent="-171450"/>
+            <a:r>
+              <a:rPr lang="en-US" sz="2050">
+                <a:solidFill>
+                  <a:srgbClr val="374151"/>
+                </a:solidFill>
+              </a:rPr>
+              <a:t>Local wallet authority controlled by humans.</a:t>
+            </a:r>
+          </a:p>
+          <a:p>
+            <a:pPr/>
+            <a:r>
+              <a:rPr lang="en-US" sz="2050" b="1">
+                <a:solidFill>
+                  <a:srgbClr val="1f2937"/>
+                </a:solidFill>
+              </a:rPr>
+              <a:t>Humans sign. Agents verify.</a:t>
+            </a:r>
+          </a:p>
+        </p:txBody>
+      </p:sp>
+      <p:sp>
+        <p:nvSpPr>
+          <p:cNvPr id="5" name="Footer"/>
+          <p:cNvSpPr txBox="1"/>
+          <p:nvPr/>
+        </p:nvSpPr>
+        <p:spPr>
+          <a:xfrm>
+            <a:off x="685800" y="6355080"/>
+            <a:ext cx="10698480" cy="256032"/>
+          </a:xfrm>
+          <a:prstGeom prst="rect">
+            <a:avLst/>
+          </a:prstGeom>
+          <a:noFill/>
+          <a:ln>
+            <a:noFill/>
+          </a:ln>
+        </p:spPr>
+        <p:txBody>
+          <a:bodyPr wrap="square" anchor="t"/>
+          <a:lstStyle/>
+          <a:p>
+            <a:pPr/>
+            <a:r>
+              <a:rPr lang="en-US" sz="1050">
+                <a:solidFill>
+                  <a:srgbClr val="64748b"/>
+                </a:solidFill>
+              </a:rPr>
+              <a:t>ProofOfWork Computer · local-first · on-chain · agent-readable</a:t>
+            </a:r>
+          </a:p>
+        </p:txBody>
+      </p:sp>
+    </p:spTree>
+  </p:cSld>
+  <p:clrMapOvr>
+    <a:masterClrMapping/>
+  </p:clrMapOvr>
+</p:sld>
+</file>
+
+<file path=ppt/slides/slide14.xml><?xml version="1.0" encoding="utf-8"?>
+<p:sld xmlns:a="http://schemas.openxmlformats.org/drawingml/2006/main" xmlns:r="http://schemas.openxmlformats.org/officeDocument/2006/relationships" xmlns:p="http://schemas.openxmlformats.org/presentationml/2006/main">
+  <p:cSld>
+    <p:bg>
+      <p:bgPr>
+        <a:solidFill>
+          <a:srgbClr val="f8fafc"/>
+        </a:solidFill>
+        <a:effectLst/>
+      </p:bgPr>
+    </p:bg>
+    <p:spTree>
+      <p:nvGrpSpPr>
+        <p:cNvPr id="1" name=""/>
+        <p:cNvGrpSpPr/>
+        <p:nvPr/>
+      </p:nvGrpSpPr>
+      <p:grpSpPr>
+        <a:xfrm>
+          <a:off x="0" y="0"/>
+          <a:ext cx="0" cy="0"/>
+          <a:chOff x="0" y="0"/>
+          <a:chExt cx="0" cy="0"/>
+        </a:xfrm>
+      </p:grpSpPr>
+      <p:sp>
+        <p:nvSpPr>
+          <p:cNvPr id="2" name="Kicker"/>
+          <p:cNvSpPr txBox="1"/>
+          <p:nvPr/>
+        </p:nvSpPr>
+        <p:spPr>
+          <a:xfrm>
+            <a:off x="640080" y="411480"/>
+            <a:ext cx="10881360" cy="320040"/>
+          </a:xfrm>
+          <a:prstGeom prst="rect">
+            <a:avLst/>
+          </a:prstGeom>
+          <a:noFill/>
+          <a:ln>
+            <a:noFill/>
+          </a:ln>
+        </p:spPr>
+        <p:txBody>
+          <a:bodyPr wrap="square" anchor="t"/>
+          <a:lstStyle/>
+          <a:p>
+            <a:pPr/>
+            <a:r>
+              <a:rPr lang="en-US" sz="1250" b="1">
+                <a:solidFill>
+                  <a:srgbClr val="0a84ff"/>
+                </a:solidFill>
+              </a:rPr>
+              <a:t>PROOFOFWORK.ME</a:t>
+            </a:r>
+          </a:p>
+        </p:txBody>
+      </p:sp>
+      <p:sp>
+        <p:nvSpPr>
+          <p:cNvPr id="3" name="Title"/>
+          <p:cNvSpPr txBox="1"/>
+          <p:nvPr/>
+        </p:nvSpPr>
+        <p:spPr>
+          <a:xfrm>
+            <a:off x="640080" y="868680"/>
+            <a:ext cx="10881360" cy="914400"/>
+          </a:xfrm>
+          <a:prstGeom prst="rect">
+            <a:avLst/>
+          </a:prstGeom>
+          <a:noFill/>
+          <a:ln>
+            <a:noFill/>
+          </a:ln>
+        </p:spPr>
+        <p:txBody>
+          <a:bodyPr wrap="square" anchor="t"/>
+          <a:lstStyle/>
+          <a:p>
+            <a:pPr/>
+            <a:r>
+              <a:rPr lang="en-US" sz="3800" b="1">
+                <a:solidFill>
+                  <a:srgbClr val="111827"/>
+                </a:solidFill>
+              </a:rPr>
+              <a:t>The Final Network</a:t>
+            </a:r>
+          </a:p>
+        </p:txBody>
+      </p:sp>
+      <p:sp>
+        <p:nvSpPr>
+          <p:cNvPr id="4" name="Body"/>
+          <p:cNvSpPr txBox="1"/>
+          <p:nvPr/>
+        </p:nvSpPr>
+        <p:spPr>
+          <a:xfrm>
+            <a:off x="685800" y="1965960"/>
+            <a:ext cx="10698480" cy="4480560"/>
+          </a:xfrm>
+          <a:prstGeom prst="rect">
+            <a:avLst/>
+          </a:prstGeom>
+          <a:noFill/>
+          <a:ln>
+            <a:noFill/>
+          </a:ln>
+        </p:spPr>
+        <p:txBody>
+          <a:bodyPr wrap="square" anchor="t"/>
+          <a:lstStyle/>
+          <a:p>
+            <a:pPr/>
+            <a:r>
+              <a:rPr lang="en-US" sz="2050">
+                <a:solidFill>
+                  <a:srgbClr val="1f2937"/>
+                </a:solidFill>
+              </a:rPr>
               <a:t>ProofOfWork.Me is a new interface for ProofOfWork.</a:t>
             </a:r>
           </a:p>
@@ -1135,128 +1375,62 @@
                   <a:srgbClr val="1f2937"/>
                 </a:solidFill>
               </a:rPr>
-              <a:t>Mail.</a:t>
-            </a:r>
-          </a:p>
-          <a:p>
-            <a:pPr/>
-            <a:r>
-              <a:rPr lang="en-US" sz="2050">
-                <a:solidFill>
-                  <a:srgbClr val="1f2937"/>
-                </a:solidFill>
-              </a:rPr>
-              <a:t>IDs.</a:t>
-            </a:r>
-          </a:p>
-          <a:p>
-            <a:pPr/>
-            <a:r>
-              <a:rPr lang="en-US" sz="2050">
-                <a:solidFill>
-                  <a:srgbClr val="1f2937"/>
-                </a:solidFill>
-              </a:rPr>
-              <a:t>Files.</a:t>
-            </a:r>
-          </a:p>
-          <a:p>
-            <a:pPr/>
-            <a:r>
-              <a:rPr lang="en-US" sz="2050">
-                <a:solidFill>
-                  <a:srgbClr val="1f2937"/>
-                </a:solidFill>
-              </a:rPr>
-              <a:t>Desktop.</a:t>
-            </a:r>
-          </a:p>
-          <a:p>
-            <a:pPr/>
-            <a:r>
-              <a:rPr lang="en-US" sz="2050">
-                <a:solidFill>
-                  <a:srgbClr val="1f2937"/>
-                </a:solidFill>
-              </a:rPr>
-              <a:t>Browser.</a:t>
-            </a:r>
-          </a:p>
-          <a:p>
-            <a:pPr/>
-            <a:r>
-              <a:rPr lang="en-US" sz="2050">
-                <a:solidFill>
-                  <a:srgbClr val="1f2937"/>
-                </a:solidFill>
-              </a:rPr>
-              <a:t>Marketplace.</a:t>
-            </a:r>
-          </a:p>
-          <a:p>
-            <a:pPr/>
-            <a:r>
-              <a:rPr lang="en-US" sz="2050">
-                <a:solidFill>
-                  <a:srgbClr val="1f2937"/>
-                </a:solidFill>
-              </a:rPr>
-              <a:t>Credits.</a:t>
-            </a:r>
-          </a:p>
-          <a:p>
-            <a:pPr/>
-            <a:r>
-              <a:rPr lang="en-US" sz="2050">
-                <a:solidFill>
-                  <a:srgbClr val="1f2937"/>
-                </a:solidFill>
-              </a:rPr>
-              <a:t>WORK.</a:t>
-            </a:r>
-          </a:p>
-          <a:p>
-            <a:pPr/>
-            <a:r>
-              <a:rPr lang="en-US" sz="2050">
-                <a:solidFill>
-                  <a:srgbClr val="1f2937"/>
-                </a:solidFill>
-              </a:rPr>
-              <a:t>Log.</a:t>
-            </a:r>
-          </a:p>
-          <a:p>
-            <a:pPr/>
-            <a:r>
-              <a:rPr lang="en-US" sz="2050">
-                <a:solidFill>
-                  <a:srgbClr val="1f2937"/>
-                </a:solidFill>
-              </a:rPr>
-              <a:t>Growth.</a:t>
-            </a:r>
-          </a:p>
-          <a:p>
-            <a:pPr/>
-            <a:r>
-              <a:rPr lang="en-US" sz="2050">
-                <a:solidFill>
-                  <a:srgbClr val="1f2937"/>
-                </a:solidFill>
-              </a:rPr>
-              <a:t>Agents.</a:t>
-            </a:r>
-          </a:p>
-          <a:p>
-            <a:pPr/>
-            <a:r>
-              <a:rPr lang="en-US" sz="2050">
-                <a:solidFill>
-                  <a:srgbClr val="1f2937"/>
-                </a:solidFill>
-              </a:rPr>
-              <a:t>Value.</a:t>
+              <a:t>Mail. IDs. Files. Desktop. Browser.</a:t>
+            </a:r>
+          </a:p>
+          <a:p>
+            <a:pPr/>
+            <a:r>
+              <a:rPr lang="en-US" sz="2050">
+                <a:solidFill>
+                  <a:srgbClr val="1f2937"/>
+                </a:solidFill>
+              </a:rPr>
+              <a:t>Marketplace. Credits. Wallet. WORK.</a:t>
+            </a:r>
+          </a:p>
+          <a:p>
+            <a:pPr/>
+            <a:r>
+              <a:rPr lang="en-US" sz="2050">
+                <a:solidFill>
+                  <a:srgbClr val="1f2937"/>
+                </a:solidFill>
+              </a:rPr>
+              <a:t>Infinity. Inception. Bonds. Log. Growth.</a:t>
+            </a:r>
+          </a:p>
+          <a:p>
+            <a:pPr/>
+            <a:r>
+              <a:rPr lang="en-US" sz="2050">
+                <a:solidFill>
+                  <a:srgbClr val="1f2937"/>
+                </a:solidFill>
+              </a:rPr>
+              <a:t>Agents. Value.</a:t>
+            </a:r>
+          </a:p>
+          <a:p>
+            <a:pPr/>
+            <a:r>
+              <a:rPr lang="en-US" sz="2050">
+                <a:solidFill>
+                  <a:srgbClr val="1f2937"/>
+                </a:solidFill>
+              </a:rPr>
+              <a:t>The final network is not a platform.</a:t>
+            </a:r>
+          </a:p>
+          <a:p>
+            <a:pPr/>
+            <a:r>
+              <a:rPr lang="en-US" sz="2050">
+                <a:solidFill>
+                  <a:srgbClr val="1f2937"/>
+                </a:solidFill>
+              </a:rPr>
+              <a:t>It is proof of work.</a:t>
             </a:r>
           </a:p>
         </p:txBody>
@@ -2937,18 +3111,7 @@
                   <a:srgbClr val="1f2937"/>
                 </a:solidFill>
               </a:rPr>
-              <a:t>ProofOfWork IDs are transferable assets.</a:t>
-            </a:r>
-          </a:p>
-          <a:p>
-            <a:pPr/>
-            <a:r>
-              <a:rPr lang="en-US" sz="2050">
-                <a:solidFill>
-                  <a:srgbClr val="1f2937"/>
-                </a:solidFill>
-              </a:rPr>
-              <a:t>Credits are transferable market assets too.</a:t>
+              <a:t>ProofOfWork IDs and credits are transferable market assets.</a:t>
             </a:r>
           </a:p>
           <a:p>
@@ -2970,84 +3133,18 @@
                   <a:srgbClr val="1f2937"/>
                 </a:solidFill>
               </a:rPr>
-              <a:t>pwid1:list5</a:t>
-            </a:r>
-          </a:p>
-          <a:p>
-            <a:pPr/>
-            <a:r>
-              <a:rPr lang="en-US" sz="2050">
-                <a:solidFill>
-                  <a:srgbClr val="1f2937"/>
-                </a:solidFill>
-              </a:rPr>
-              <a:t>pwid1:seal5</a:t>
-            </a:r>
-          </a:p>
-          <a:p>
-            <a:pPr/>
-            <a:r>
-              <a:rPr lang="en-US" sz="2050">
-                <a:solidFill>
-                  <a:srgbClr val="1f2937"/>
-                </a:solidFill>
-              </a:rPr>
-              <a:t>pwid1:buy5</a:t>
-            </a:r>
-          </a:p>
-          <a:p>
-            <a:pPr/>
-            <a:r>
-              <a:rPr lang="en-US" sz="2050">
-                <a:solidFill>
-                  <a:srgbClr val="1f2937"/>
-                </a:solidFill>
-              </a:rPr>
-              <a:t>pwid1:delist5</a:t>
-            </a:r>
-          </a:p>
-          <a:p>
-            <a:pPr/>
-            <a:r>
-              <a:rPr lang="en-US" sz="2050">
-                <a:solidFill>
-                  <a:srgbClr val="1f2937"/>
-                </a:solidFill>
-              </a:rPr>
-              <a:t>pwt1:list5</a:t>
-            </a:r>
-          </a:p>
-          <a:p>
-            <a:pPr/>
-            <a:r>
-              <a:rPr lang="en-US" sz="2050">
-                <a:solidFill>
-                  <a:srgbClr val="1f2937"/>
-                </a:solidFill>
-              </a:rPr>
-              <a:t>pwt1:seal5</a:t>
-            </a:r>
-          </a:p>
-          <a:p>
-            <a:pPr/>
-            <a:r>
-              <a:rPr lang="en-US" sz="2050">
-                <a:solidFill>
-                  <a:srgbClr val="1f2937"/>
-                </a:solidFill>
-              </a:rPr>
-              <a:t>pwt1:buy5</a:t>
-            </a:r>
-          </a:p>
-          <a:p>
-            <a:pPr/>
-            <a:r>
-              <a:rPr lang="en-US" sz="2050">
-                <a:solidFill>
-                  <a:srgbClr val="1f2937"/>
-                </a:solidFill>
-              </a:rPr>
-              <a:t>pwt1:delist5</a:t>
+              <a:t>pwid1: list5 · seal5 · buy5 · delist5</a:t>
+            </a:r>
+          </a:p>
+          <a:p>
+            <a:pPr/>
+            <a:r>
+              <a:rPr lang="en-US" sz="2050">
+                <a:solidFill>
+                  <a:srgbClr val="1f2937"/>
+                </a:solidFill>
+              </a:rPr>
+              <a:t>pwt1:  list5 · seal5 · buy5 · delist5</a:t>
             </a:r>
           </a:p>
           <a:p>
@@ -3070,6 +3167,28 @@
                 </a:solidFill>
               </a:rPr>
               <a:t>Buyers settle by spending a sale-ticket UTXO, paying the seller, paying the registry mutation fee, and writing the transfer or buy event.</a:t>
+            </a:r>
+          </a:p>
+          <a:p>
+            <a:pPr/>
+            <a:r>
+              <a:rPr lang="en-US" sz="2050">
+                <a:solidFill>
+                  <a:srgbClr val="1f2937"/>
+                </a:solidFill>
+              </a:rPr>
+              <a:t>Competing buys conflict at the ProofOfWork UTXO layer.</a:t>
+            </a:r>
+          </a:p>
+          <a:p>
+            <a:pPr/>
+            <a:r>
+              <a:rPr lang="en-US" sz="1700">
+                <a:solidFill>
+                  <a:srgbClr val="1f2937"/>
+                </a:solidFill>
+              </a:rPr>
+              <a:t>Current governed WORK list, seal, and buy actions use pwt-sale-v3 with exact atoms and a hash-bound H-1 pricing commitment.</a:t>
             </a:r>
           </a:p>
         </p:txBody>

--- a/output/proofofwork-general-deck.pptx
+++ b/output/proofofwork-general-deck.pptx
@@ -169,7 +169,7 @@
                   <a:srgbClr val="1f2937"/>
                 </a:solidFill>
               </a:rPr>
-              <a:t>Identity, mail, files, pages, marketplace actions, credit mints, wallet transfers, bonds, logs, and growth signals written to ProofOfWork.</a:t>
+              <a:t>Identity, mail, files, pages, AMO actions, credit mints, wallet transfers, bonds, logs, and growth signals written to ProofOfWork.</a:t>
             </a:r>
           </a:p>
         </p:txBody>
@@ -1169,7 +1169,7 @@
                   <a:srgbClr val="374151"/>
                 </a:solidFill>
               </a:rPr>
-              <a:t>Public ownership, marketplace, funding, and credit records.</a:t>
+              <a:t>Public ownership, AMO, funding, and credit records.</a:t>
             </a:r>
           </a:p>
           <a:p>
@@ -1386,7 +1386,7 @@
                   <a:srgbClr val="1f2937"/>
                 </a:solidFill>
               </a:rPr>
-              <a:t>Marketplace. Credits. Wallet. WORK.</a:t>
+              <a:t>AMO. Credits. Wallet. WORK.</a:t>
             </a:r>
           </a:p>
           <a:p>
@@ -2087,12 +2087,12 @@
           <a:p>
             <a:pPr/>
             <a:r>
-              <a:rPr lang="en-US" sz="1850">
-                <a:solidFill>
-                  <a:srgbClr val="1f2937"/>
-                </a:solidFill>
-              </a:rPr>
-              <a:t>Owners can update receivers, transfer IDs, and list IDs in the marketplace.</a:t>
+              <a:rPr lang="en-US" sz="2050">
+                <a:solidFill>
+                  <a:srgbClr val="1f2937"/>
+                </a:solidFill>
+              </a:rPr>
+              <a:t>Owners can update receivers, transfer IDs, and list IDs in AMO.</a:t>
             </a:r>
           </a:p>
         </p:txBody>
@@ -3076,7 +3076,7 @@
                   <a:srgbClr val="111827"/>
                 </a:solidFill>
               </a:rPr>
-              <a:t>Marketplace</a:t>
+              <a:t>AMO</a:t>
             </a:r>
           </a:p>
         </p:txBody>
@@ -3106,23 +3106,23 @@
           <a:p>
             <a:pPr/>
             <a:r>
-              <a:rPr lang="en-US" sz="2050">
-                <a:solidFill>
-                  <a:srgbClr val="1f2937"/>
-                </a:solidFill>
-              </a:rPr>
-              <a:t>ProofOfWork IDs and credits are transferable market assets.</a:t>
-            </a:r>
-          </a:p>
-          <a:p>
-            <a:pPr/>
-            <a:r>
-              <a:rPr lang="en-US" sz="2050">
-                <a:solidFill>
-                  <a:srgbClr val="1f2937"/>
-                </a:solidFill>
-              </a:rPr>
-              <a:t>Current marketplace protocols:</a:t>
+              <a:rPr lang="en-US" sz="1850">
+                <a:solidFill>
+                  <a:srgbClr val="1f2937"/>
+                </a:solidFill>
+              </a:rPr>
+              <a:t>AMO is the Autonomous Money Organization for transferable ProofOfWork IDs and credits.</a:t>
+            </a:r>
+          </a:p>
+          <a:p>
+            <a:pPr/>
+            <a:r>
+              <a:rPr lang="en-US" sz="2050">
+                <a:solidFill>
+                  <a:srgbClr val="1f2937"/>
+                </a:solidFill>
+              </a:rPr>
+              <a:t>Current AMO protocols:</a:t>
             </a:r>
           </a:p>
           <a:p>
@@ -3183,12 +3183,34 @@
           <a:p>
             <a:pPr/>
             <a:r>
+              <a:rPr lang="en-US" sz="2050">
+                <a:solidFill>
+                  <a:srgbClr val="1f2937"/>
+                </a:solidFill>
+              </a:rPr>
+              <a:t>Current governed WORK actions use pwt-sale-v5.</a:t>
+            </a:r>
+          </a:p>
+          <a:p>
+            <a:pPr/>
+            <a:r>
               <a:rPr lang="en-US" sz="1700">
                 <a:solidFill>
                   <a:srgbClr val="1f2937"/>
                 </a:solidFill>
               </a:rPr>
-              <a:t>Current governed WORK list, seal, and buy actions use pwt-sale-v3 with exact atoms and a hash-bound H-1 pricing commitment.</a:t>
+              <a:t>Users choose a $20, $50, or $100 face. Confirmed ProofOfWork order derives and freezes the exact WORK amount and proof price.</a:t>
+            </a:r>
+          </a:p>
+          <a:p>
+            <a:pPr/>
+            <a:r>
+              <a:rPr lang="en-US" sz="2050">
+                <a:solidFill>
+                  <a:srgbClr val="1f2937"/>
+                </a:solidFill>
+              </a:rPr>
+              <a:t>Seals and buys use those frozen terms without later repricing.</a:t>
             </a:r>
           </a:p>
         </p:txBody>
